--- a/powerpoints/AI基礎素養.pptx
+++ b/powerpoints/AI基礎素養.pptx
@@ -203,7 +203,7 @@
           <a:p>
             <a:fld id="{218B8EE1-5A5B-C74A-BA10-FF4A9DF62F8A}" type="datetimeFigureOut">
               <a:rPr kumimoji="1" lang="zh-TW" altLang="en-US" smtClean="0"/>
-              <a:t>2026/6/16</a:t>
+              <a:t>2026/6/28</a:t>
             </a:fld>
             <a:endParaRPr kumimoji="1" lang="zh-TW" altLang="en-US"/>
           </a:p>
@@ -701,7 +701,7 @@
           <a:p>
             <a:fld id="{B211D176-C48C-784F-B433-484D39C746EB}" type="datetimeFigureOut">
               <a:rPr kumimoji="1" lang="zh-TW" altLang="en-US" smtClean="0"/>
-              <a:t>2026/6/16</a:t>
+              <a:t>2026/6/28</a:t>
             </a:fld>
             <a:endParaRPr kumimoji="1" lang="zh-TW" altLang="en-US"/>
           </a:p>
@@ -1114,7 +1114,7 @@
           <a:p>
             <a:fld id="{B211D176-C48C-784F-B433-484D39C746EB}" type="datetimeFigureOut">
               <a:rPr kumimoji="1" lang="zh-TW" altLang="en-US" smtClean="0"/>
-              <a:t>2026/6/16</a:t>
+              <a:t>2026/6/28</a:t>
             </a:fld>
             <a:endParaRPr kumimoji="1" lang="zh-TW" altLang="en-US"/>
           </a:p>
@@ -1485,7 +1485,7 @@
           <a:p>
             <a:fld id="{B211D176-C48C-784F-B433-484D39C746EB}" type="datetimeFigureOut">
               <a:rPr kumimoji="1" lang="zh-TW" altLang="en-US" smtClean="0"/>
-              <a:t>2026/6/16</a:t>
+              <a:t>2026/6/28</a:t>
             </a:fld>
             <a:endParaRPr kumimoji="1" lang="zh-TW" altLang="en-US"/>
           </a:p>
@@ -1626,7 +1626,7 @@
           <a:p>
             <a:fld id="{B211D176-C48C-784F-B433-484D39C746EB}" type="datetimeFigureOut">
               <a:rPr kumimoji="1" lang="zh-TW" altLang="en-US" smtClean="0"/>
-              <a:t>2026/6/16</a:t>
+              <a:t>2026/6/28</a:t>
             </a:fld>
             <a:endParaRPr kumimoji="1" lang="zh-TW" altLang="en-US"/>
           </a:p>
@@ -1739,7 +1739,7 @@
           <a:p>
             <a:fld id="{B211D176-C48C-784F-B433-484D39C746EB}" type="datetimeFigureOut">
               <a:rPr kumimoji="1" lang="zh-TW" altLang="en-US" smtClean="0"/>
-              <a:t>2026/6/16</a:t>
+              <a:t>2026/6/28</a:t>
             </a:fld>
             <a:endParaRPr kumimoji="1" lang="zh-TW" altLang="en-US"/>
           </a:p>
@@ -2050,7 +2050,7 @@
           <a:p>
             <a:fld id="{B211D176-C48C-784F-B433-484D39C746EB}" type="datetimeFigureOut">
               <a:rPr kumimoji="1" lang="zh-TW" altLang="en-US" smtClean="0"/>
-              <a:t>2026/6/16</a:t>
+              <a:t>2026/6/28</a:t>
             </a:fld>
             <a:endParaRPr kumimoji="1" lang="zh-TW" altLang="en-US"/>
           </a:p>
@@ -2341,7 +2341,7 @@
           <a:p>
             <a:fld id="{B211D176-C48C-784F-B433-484D39C746EB}" type="datetimeFigureOut">
               <a:rPr kumimoji="1" lang="zh-TW" altLang="en-US" smtClean="0"/>
-              <a:t>2026/6/16</a:t>
+              <a:t>2026/6/28</a:t>
             </a:fld>
             <a:endParaRPr kumimoji="1" lang="zh-TW" altLang="en-US"/>
           </a:p>
@@ -2539,7 +2539,7 @@
           <a:p>
             <a:fld id="{B211D176-C48C-784F-B433-484D39C746EB}" type="datetimeFigureOut">
               <a:rPr kumimoji="1" lang="zh-TW" altLang="en-US" smtClean="0"/>
-              <a:t>2026/6/16</a:t>
+              <a:t>2026/6/28</a:t>
             </a:fld>
             <a:endParaRPr kumimoji="1" lang="zh-TW" altLang="en-US"/>
           </a:p>
@@ -2747,7 +2747,7 @@
           <a:p>
             <a:fld id="{B211D176-C48C-784F-B433-484D39C746EB}" type="datetimeFigureOut">
               <a:rPr kumimoji="1" lang="zh-TW" altLang="en-US" smtClean="0"/>
-              <a:t>2026/6/16</a:t>
+              <a:t>2026/6/28</a:t>
             </a:fld>
             <a:endParaRPr kumimoji="1" lang="zh-TW" altLang="en-US"/>
           </a:p>
@@ -2945,7 +2945,7 @@
           <a:p>
             <a:fld id="{B211D176-C48C-784F-B433-484D39C746EB}" type="datetimeFigureOut">
               <a:rPr kumimoji="1" lang="zh-TW" altLang="en-US" smtClean="0"/>
-              <a:t>2026/6/16</a:t>
+              <a:t>2026/6/28</a:t>
             </a:fld>
             <a:endParaRPr kumimoji="1" lang="zh-TW" altLang="en-US"/>
           </a:p>
@@ -3120,7 +3120,7 @@
           <a:p>
             <a:fld id="{B211D176-C48C-784F-B433-484D39C746EB}" type="datetimeFigureOut">
               <a:rPr kumimoji="1" lang="zh-TW" altLang="en-US" smtClean="0"/>
-              <a:t>2026/6/16</a:t>
+              <a:t>2026/6/28</a:t>
             </a:fld>
             <a:endParaRPr kumimoji="1" lang="zh-TW" altLang="en-US"/>
           </a:p>
@@ -3354,7 +3354,7 @@
           <a:p>
             <a:fld id="{B211D176-C48C-784F-B433-484D39C746EB}" type="datetimeFigureOut">
               <a:rPr kumimoji="1" lang="zh-TW" altLang="en-US" smtClean="0"/>
-              <a:t>2026/6/16</a:t>
+              <a:t>2026/6/28</a:t>
             </a:fld>
             <a:endParaRPr kumimoji="1" lang="zh-TW" altLang="en-US"/>
           </a:p>
@@ -3629,7 +3629,7 @@
           <a:p>
             <a:fld id="{B211D176-C48C-784F-B433-484D39C746EB}" type="datetimeFigureOut">
               <a:rPr kumimoji="1" lang="zh-TW" altLang="en-US" smtClean="0"/>
-              <a:t>2026/6/16</a:t>
+              <a:t>2026/6/28</a:t>
             </a:fld>
             <a:endParaRPr kumimoji="1" lang="zh-TW" altLang="en-US"/>
           </a:p>
@@ -3894,7 +3894,7 @@
           <a:p>
             <a:fld id="{B211D176-C48C-784F-B433-484D39C746EB}" type="datetimeFigureOut">
               <a:rPr kumimoji="1" lang="zh-TW" altLang="en-US" smtClean="0"/>
-              <a:t>2026/6/16</a:t>
+              <a:t>2026/6/28</a:t>
             </a:fld>
             <a:endParaRPr kumimoji="1" lang="zh-TW" altLang="en-US"/>
           </a:p>
@@ -4260,7 +4260,7 @@
           <a:p>
             <a:fld id="{B211D176-C48C-784F-B433-484D39C746EB}" type="datetimeFigureOut">
               <a:rPr kumimoji="1" lang="zh-TW" altLang="en-US" smtClean="0"/>
-              <a:t>2026/6/16</a:t>
+              <a:t>2026/6/28</a:t>
             </a:fld>
             <a:endParaRPr kumimoji="1" lang="zh-TW" altLang="en-US"/>
           </a:p>
@@ -4497,7 +4497,7 @@
           <a:p>
             <a:fld id="{B211D176-C48C-784F-B433-484D39C746EB}" type="datetimeFigureOut">
               <a:rPr kumimoji="1" lang="zh-TW" altLang="en-US" smtClean="0"/>
-              <a:t>2026/6/16</a:t>
+              <a:t>2026/6/28</a:t>
             </a:fld>
             <a:endParaRPr kumimoji="1" lang="zh-TW" altLang="en-US"/>
           </a:p>
@@ -4835,7 +4835,7 @@
           <a:p>
             <a:fld id="{B211D176-C48C-784F-B433-484D39C746EB}" type="datetimeFigureOut">
               <a:rPr kumimoji="1" lang="zh-TW" altLang="en-US" smtClean="0"/>
-              <a:t>2026/6/16</a:t>
+              <a:t>2026/6/28</a:t>
             </a:fld>
             <a:endParaRPr kumimoji="1" lang="zh-TW" altLang="en-US"/>
           </a:p>
@@ -5092,7 +5092,7 @@
             <a:fld id="{B211D176-C48C-784F-B433-484D39C746EB}" type="datetimeFigureOut">
               <a:rPr kumimoji="1" lang="zh-TW" altLang="en-US" smtClean="0"/>
               <a:pPr/>
-              <a:t>2026/6/16</a:t>
+              <a:t>2026/6/28</a:t>
             </a:fld>
             <a:endParaRPr kumimoji="1" lang="zh-TW" altLang="en-US"/>
           </a:p>
@@ -5772,7 +5772,7 @@
           <a:p>
             <a:r>
               <a:rPr kumimoji="1" lang="zh-TW" altLang="en-US" dirty="0"/>
-              <a:t>本課程在協助本校五專部新生建立 </a:t>
+              <a:t>本課程在協助本校五專新生建立 </a:t>
             </a:r>
             <a:r>
               <a:rPr kumimoji="1" lang="zh-TW" altLang="en-US" b="1" dirty="0"/>
@@ -5788,7 +5788,15 @@
             </a:r>
             <a:r>
               <a:rPr kumimoji="1" lang="zh-TW" altLang="en-US" dirty="0"/>
-              <a:t>的用途、</a:t>
+              <a:t>的</a:t>
+            </a:r>
+            <a:r>
+              <a:rPr kumimoji="1" lang="zh-TW" altLang="en-US" b="1" dirty="0"/>
+              <a:t>用途</a:t>
+            </a:r>
+            <a:r>
+              <a:rPr kumimoji="1" lang="zh-TW" altLang="en-US" dirty="0"/>
+              <a:t>、</a:t>
             </a:r>
             <a:r>
               <a:rPr kumimoji="1" lang="zh-TW" altLang="en-US" b="1" dirty="0"/>
@@ -5804,7 +5812,7 @@
             </a:r>
             <a:r>
               <a:rPr kumimoji="1" lang="zh-TW" altLang="en-US" dirty="0"/>
-              <a:t>，能在未來學習情境中</a:t>
+              <a:t>，能在未來的學習情境中</a:t>
             </a:r>
             <a:r>
               <a:rPr kumimoji="1" lang="zh-TW" altLang="en-US" b="1" dirty="0"/>
@@ -5820,14 +5828,14 @@
             </a:r>
             <a:r>
               <a:rPr kumimoji="1" lang="zh-TW" altLang="en-US" dirty="0"/>
-              <a:t>工具來輔助學習上的搜尋、摘要、整理、改寫與創意發想。</a:t>
+              <a:t>工具輔助學習上的搜尋、摘要、整理、改寫與創意發想。</a:t>
             </a:r>
             <a:endParaRPr kumimoji="1" lang="en-US" altLang="zh-TW" dirty="0"/>
           </a:p>
           <a:p>
             <a:r>
               <a:rPr kumimoji="1" lang="zh-TW" altLang="en-US" dirty="0"/>
-              <a:t>課程結合生活案例與商管情境，避免過度理論，讓學員能將 </a:t>
+              <a:t>課程結合生活案例與商管情境，避免過度的理論，讓學員能將 </a:t>
             </a:r>
             <a:r>
               <a:rPr kumimoji="1" lang="en-US" altLang="zh-TW" dirty="0"/>
@@ -6228,7 +6236,7 @@
             </a:r>
             <a:r>
               <a:rPr kumimoji="1" lang="zh-TW" altLang="en-US" dirty="0"/>
-              <a:t>做全部操作內容。</a:t>
+              <a:t>產出做為全部繳交的內容。</a:t>
             </a:r>
           </a:p>
           <a:p>
@@ -6256,7 +6264,7 @@
             </a:pPr>
             <a:r>
               <a:rPr kumimoji="1" lang="zh-TW" altLang="en-US" dirty="0"/>
-              <a:t>嚴禁上傳個人隱私、未經授權資料 或 敏感內容。</a:t>
+              <a:t>切勿上傳個人隱私、未經授權資料 或 敏感內容。</a:t>
             </a:r>
           </a:p>
           <a:p>
@@ -6361,7 +6369,7 @@
             <p:ph idx="1"/>
             <p:extLst>
               <p:ext uri="{D42A27DB-BD31-4B8C-83A1-F6EECF244321}">
-                <p14:modId xmlns:p14="http://schemas.microsoft.com/office/powerpoint/2010/main" val="4277285979"/>
+                <p14:modId xmlns:p14="http://schemas.microsoft.com/office/powerpoint/2010/main" val="1864274101"/>
               </p:ext>
             </p:extLst>
           </p:nvPr>
@@ -6524,12 +6532,68 @@
                     <a:lstStyle/>
                     <a:p>
                       <a:r>
-                        <a:rPr lang="zh-TW" altLang="en-US" sz="1500" dirty="0">
-                          <a:latin typeface="Microsoft JhengHei" panose="020B0604030504040204" pitchFamily="34" charset="-120"/>
-                          <a:ea typeface="Microsoft JhengHei" panose="020B0604030504040204" pitchFamily="34" charset="-120"/>
-                        </a:rPr>
-                        <a:t>ＡＩ入門，認識ＡＩ</a:t>
-                      </a:r>
+                        <a:rPr lang="zh-TW" altLang="zh-TW" sz="1500" kern="1200" dirty="0">
+                          <a:solidFill>
+                            <a:schemeClr val="dk1"/>
+                          </a:solidFill>
+                          <a:latin typeface="Microsoft JhengHei" panose="020B0604030504040204" pitchFamily="34" charset="-120"/>
+                          <a:ea typeface="Microsoft JhengHei" panose="020B0604030504040204" pitchFamily="34" charset="-120"/>
+                          <a:cs typeface="+mn-cs"/>
+                        </a:rPr>
+                        <a:t>迷思解構</a:t>
+                      </a:r>
+                      <a:r>
+                        <a:rPr lang="en-US" altLang="zh-TW" sz="1500" kern="1200" dirty="0">
+                          <a:solidFill>
+                            <a:schemeClr val="dk1"/>
+                          </a:solidFill>
+                          <a:latin typeface="Microsoft JhengHei" panose="020B0604030504040204" pitchFamily="34" charset="-120"/>
+                          <a:ea typeface="Microsoft JhengHei" panose="020B0604030504040204" pitchFamily="34" charset="-120"/>
+                          <a:cs typeface="+mn-cs"/>
+                        </a:rPr>
+                        <a:t>—</a:t>
+                      </a:r>
+                      <a:r>
+                        <a:rPr lang="zh-TW" altLang="zh-TW" sz="1500" kern="1200" dirty="0">
+                          <a:solidFill>
+                            <a:schemeClr val="dk1"/>
+                          </a:solidFill>
+                          <a:latin typeface="Microsoft JhengHei" panose="020B0604030504040204" pitchFamily="34" charset="-120"/>
+                          <a:ea typeface="Microsoft JhengHei" panose="020B0604030504040204" pitchFamily="34" charset="-120"/>
+                          <a:cs typeface="+mn-cs"/>
+                        </a:rPr>
+                        <a:t>什麼是</a:t>
+                      </a:r>
+                      <a:r>
+                        <a:rPr lang="en-US" altLang="zh-TW" sz="1500" kern="1200" dirty="0">
+                          <a:solidFill>
+                            <a:schemeClr val="dk1"/>
+                          </a:solidFill>
+                          <a:latin typeface="Microsoft JhengHei" panose="020B0604030504040204" pitchFamily="34" charset="-120"/>
+                          <a:ea typeface="Microsoft JhengHei" panose="020B0604030504040204" pitchFamily="34" charset="-120"/>
+                          <a:cs typeface="+mn-cs"/>
+                        </a:rPr>
+                        <a:t>AI</a:t>
+                      </a:r>
+                      <a:r>
+                        <a:rPr lang="zh-TW" altLang="zh-TW" sz="1500" kern="1200" dirty="0">
+                          <a:solidFill>
+                            <a:schemeClr val="dk1"/>
+                          </a:solidFill>
+                          <a:latin typeface="Microsoft JhengHei" panose="020B0604030504040204" pitchFamily="34" charset="-120"/>
+                          <a:ea typeface="Microsoft JhengHei" panose="020B0604030504040204" pitchFamily="34" charset="-120"/>
+                          <a:cs typeface="+mn-cs"/>
+                        </a:rPr>
+                        <a:t>？ </a:t>
+                      </a:r>
+                      <a:endParaRPr lang="zh-TW" altLang="en-US" sz="1500" kern="1200" dirty="0">
+                        <a:solidFill>
+                          <a:schemeClr val="dk1"/>
+                        </a:solidFill>
+                        <a:latin typeface="Microsoft JhengHei" panose="020B0604030504040204" pitchFamily="34" charset="-120"/>
+                        <a:ea typeface="Microsoft JhengHei" panose="020B0604030504040204" pitchFamily="34" charset="-120"/>
+                        <a:cs typeface="+mn-cs"/>
+                      </a:endParaRPr>
                     </a:p>
                   </a:txBody>
                   <a:tcPr marL="36000" marR="36000" marT="36000" marB="36000" anchor="ctr"/>
@@ -6706,16 +6770,34 @@
                     <a:bodyPr/>
                     <a:lstStyle/>
                     <a:p>
-                      <a:r>
-                        <a:rPr lang="zh-TW" altLang="en-US" sz="1500" dirty="0">
-                          <a:latin typeface="Microsoft JhengHei" panose="020B0604030504040204" pitchFamily="34" charset="-120"/>
-                          <a:ea typeface="Microsoft JhengHei" panose="020B0604030504040204" pitchFamily="34" charset="-120"/>
-                        </a:rPr>
-                        <a:t>與ＡＩ溝通</a:t>
+                      <a:pPr algn="ctr">
+                        <a:buNone/>
+                      </a:pPr>
+                      <a:r>
+                        <a:rPr lang="en-US" sz="1500" kern="1200" dirty="0">
+                          <a:solidFill>
+                            <a:schemeClr val="dk1"/>
+                          </a:solidFill>
+                          <a:latin typeface="Microsoft JhengHei" panose="020B0604030504040204" pitchFamily="34" charset="-120"/>
+                          <a:ea typeface="Microsoft JhengHei" panose="020B0604030504040204" pitchFamily="34" charset="-120"/>
+                          <a:cs typeface="+mn-cs"/>
+                        </a:rPr>
+                        <a:t>AI</a:t>
+                      </a:r>
+                      <a:r>
+                        <a:rPr lang="zh-TW" altLang="en-US" sz="1500" kern="1200" dirty="0">
+                          <a:solidFill>
+                            <a:schemeClr val="dk1"/>
+                          </a:solidFill>
+                          <a:latin typeface="Microsoft JhengHei" panose="020B0604030504040204" pitchFamily="34" charset="-120"/>
+                          <a:ea typeface="Microsoft JhengHei" panose="020B0604030504040204" pitchFamily="34" charset="-120"/>
+                          <a:cs typeface="+mn-cs"/>
+                        </a:rPr>
+                        <a:t>溝通術</a:t>
                       </a:r>
                     </a:p>
                   </a:txBody>
-                  <a:tcPr marL="36000" marR="36000" marT="36000" marB="36000" anchor="ctr"/>
+                  <a:tcPr marL="17780" marR="17780" marT="0" marB="0" anchor="ctr"/>
                 </a:tc>
                 <a:tc>
                   <a:txBody>
@@ -6968,16 +7050,45 @@
                     <a:bodyPr/>
                     <a:lstStyle/>
                     <a:p>
-                      <a:r>
-                        <a:rPr lang="zh-TW" altLang="en-US" sz="1500" dirty="0">
-                          <a:latin typeface="Microsoft JhengHei" panose="020B0604030504040204" pitchFamily="34" charset="-120"/>
-                          <a:ea typeface="Microsoft JhengHei" panose="020B0604030504040204" pitchFamily="34" charset="-120"/>
-                        </a:rPr>
-                        <a:t>利用ＡＩ搜尋與整理</a:t>
+                      <a:pPr algn="ctr">
+                        <a:buNone/>
+                      </a:pPr>
+                      <a:r>
+                        <a:rPr lang="zh-TW" altLang="en-US" sz="1500" kern="1200" dirty="0">
+                          <a:solidFill>
+                            <a:schemeClr val="dk1"/>
+                          </a:solidFill>
+                          <a:latin typeface="Microsoft JhengHei" panose="020B0604030504040204" pitchFamily="34" charset="-120"/>
+                          <a:ea typeface="Microsoft JhengHei" panose="020B0604030504040204" pitchFamily="34" charset="-120"/>
+                          <a:cs typeface="+mn-cs"/>
+                        </a:rPr>
+                        <a:t>利用</a:t>
+                      </a:r>
+                      <a:r>
+                        <a:rPr lang="en-US" sz="1500" kern="1200" dirty="0">
+                          <a:solidFill>
+                            <a:schemeClr val="dk1"/>
+                          </a:solidFill>
+                          <a:latin typeface="Microsoft JhengHei" panose="020B0604030504040204" pitchFamily="34" charset="-120"/>
+                          <a:ea typeface="Microsoft JhengHei" panose="020B0604030504040204" pitchFamily="34" charset="-120"/>
+                          <a:cs typeface="+mn-cs"/>
+                        </a:rPr>
+                        <a:t>AI</a:t>
+                      </a:r>
+                      <a:r>
+                        <a:rPr lang="zh-TW" altLang="en-US" sz="1500" kern="1200" dirty="0">
+                          <a:solidFill>
+                            <a:schemeClr val="dk1"/>
+                          </a:solidFill>
+                          <a:latin typeface="Microsoft JhengHei" panose="020B0604030504040204" pitchFamily="34" charset="-120"/>
+                          <a:ea typeface="Microsoft JhengHei" panose="020B0604030504040204" pitchFamily="34" charset="-120"/>
+                          <a:cs typeface="+mn-cs"/>
+                        </a:rPr>
+                        <a:t>來搜尋與整理</a:t>
                       </a:r>
                     </a:p>
                   </a:txBody>
-                  <a:tcPr marL="36000" marR="36000" marT="36000" marB="36000" anchor="ctr"/>
+                  <a:tcPr marL="17780" marR="17780" marT="0" marB="0" anchor="ctr"/>
                 </a:tc>
                 <a:tc>
                   <a:txBody>
@@ -7116,16 +7227,23 @@
                     <a:bodyPr/>
                     <a:lstStyle/>
                     <a:p>
-                      <a:r>
-                        <a:rPr lang="zh-TW" altLang="en-US" sz="1500" dirty="0">
-                          <a:latin typeface="Microsoft JhengHei" panose="020B0604030504040204" pitchFamily="34" charset="-120"/>
-                          <a:ea typeface="Microsoft JhengHei" panose="020B0604030504040204" pitchFamily="34" charset="-120"/>
+                      <a:pPr algn="ctr">
+                        <a:buNone/>
+                      </a:pPr>
+                      <a:r>
+                        <a:rPr lang="zh-TW" altLang="en-US" sz="1500" kern="1200" dirty="0">
+                          <a:solidFill>
+                            <a:schemeClr val="dk1"/>
+                          </a:solidFill>
+                          <a:latin typeface="Microsoft JhengHei" panose="020B0604030504040204" pitchFamily="34" charset="-120"/>
+                          <a:ea typeface="Microsoft JhengHei" panose="020B0604030504040204" pitchFamily="34" charset="-120"/>
+                          <a:cs typeface="+mn-cs"/>
                         </a:rPr>
                         <a:t>商管情境應用</a:t>
                       </a:r>
                     </a:p>
                   </a:txBody>
-                  <a:tcPr marL="36000" marR="36000" marT="36000" marB="36000" anchor="ctr"/>
+                  <a:tcPr marL="17780" marR="17780" marT="0" marB="0" anchor="ctr"/>
                 </a:tc>
                 <a:tc>
                   <a:txBody>
@@ -7250,16 +7368,23 @@
                     <a:bodyPr/>
                     <a:lstStyle/>
                     <a:p>
-                      <a:r>
-                        <a:rPr lang="zh-TW" altLang="en-US" sz="1500" dirty="0">
-                          <a:latin typeface="Microsoft JhengHei" panose="020B0604030504040204" pitchFamily="34" charset="-120"/>
-                          <a:ea typeface="Microsoft JhengHei" panose="020B0604030504040204" pitchFamily="34" charset="-120"/>
-                        </a:rPr>
-                        <a:t>外語與資訊應用</a:t>
+                      <a:pPr algn="ctr">
+                        <a:buNone/>
+                      </a:pPr>
+                      <a:r>
+                        <a:rPr lang="zh-TW" altLang="en-US" sz="1500" kern="1200" dirty="0">
+                          <a:solidFill>
+                            <a:schemeClr val="dk1"/>
+                          </a:solidFill>
+                          <a:latin typeface="Microsoft JhengHei" panose="020B0604030504040204" pitchFamily="34" charset="-120"/>
+                          <a:ea typeface="Microsoft JhengHei" panose="020B0604030504040204" pitchFamily="34" charset="-120"/>
+                          <a:cs typeface="+mn-cs"/>
+                        </a:rPr>
+                        <a:t>英語與資訊應用</a:t>
                       </a:r>
                     </a:p>
                   </a:txBody>
-                  <a:tcPr marL="36000" marR="36000" marT="36000" marB="36000" anchor="ctr"/>
+                  <a:tcPr marL="17780" marR="17780" marT="0" marB="0" anchor="ctr"/>
                 </a:tc>
                 <a:tc>
                   <a:txBody>
@@ -7398,16 +7523,34 @@
                     <a:bodyPr/>
                     <a:lstStyle/>
                     <a:p>
-                      <a:r>
-                        <a:rPr lang="zh-TW" altLang="en-US" sz="1500" dirty="0">
-                          <a:latin typeface="Microsoft JhengHei" panose="020B0604030504040204" pitchFamily="34" charset="-120"/>
-                          <a:ea typeface="Microsoft JhengHei" panose="020B0604030504040204" pitchFamily="34" charset="-120"/>
-                        </a:rPr>
-                        <a:t>倫理成果發表</a:t>
+                      <a:pPr algn="ctr">
+                        <a:buNone/>
+                      </a:pPr>
+                      <a:r>
+                        <a:rPr lang="en-US" sz="1500" kern="1200" dirty="0">
+                          <a:solidFill>
+                            <a:schemeClr val="dk1"/>
+                          </a:solidFill>
+                          <a:latin typeface="Microsoft JhengHei" panose="020B0604030504040204" pitchFamily="34" charset="-120"/>
+                          <a:ea typeface="Microsoft JhengHei" panose="020B0604030504040204" pitchFamily="34" charset="-120"/>
+                          <a:cs typeface="+mn-cs"/>
+                        </a:rPr>
+                        <a:t>AI</a:t>
+                      </a:r>
+                      <a:r>
+                        <a:rPr lang="zh-TW" altLang="en-US" sz="1500" kern="1200" dirty="0">
+                          <a:solidFill>
+                            <a:schemeClr val="dk1"/>
+                          </a:solidFill>
+                          <a:latin typeface="Microsoft JhengHei" panose="020B0604030504040204" pitchFamily="34" charset="-120"/>
+                          <a:ea typeface="Microsoft JhengHei" panose="020B0604030504040204" pitchFamily="34" charset="-120"/>
+                          <a:cs typeface="+mn-cs"/>
+                        </a:rPr>
+                        <a:t>倫理與專題發表</a:t>
                       </a:r>
                     </a:p>
                   </a:txBody>
-                  <a:tcPr marL="36000" marR="36000" marT="36000" marB="36000" anchor="ctr"/>
+                  <a:tcPr marL="17780" marR="17780" marT="0" marB="0" anchor="ctr"/>
                 </a:tc>
                 <a:tc>
                   <a:txBody>
@@ -7499,6 +7642,80 @@
           </a:graphicData>
         </a:graphic>
       </p:graphicFrame>
+      <p:sp>
+        <p:nvSpPr>
+          <p:cNvPr id="2" name="文字方塊 1">
+            <a:extLst>
+              <a:ext uri="{FF2B5EF4-FFF2-40B4-BE49-F238E27FC236}">
+                <a16:creationId xmlns:a16="http://schemas.microsoft.com/office/drawing/2014/main" id="{AFDE38FB-E007-E11C-6140-B34FA7CC7D24}"/>
+              </a:ext>
+            </a:extLst>
+          </p:cNvPr>
+          <p:cNvSpPr txBox="1"/>
+          <p:nvPr/>
+        </p:nvSpPr>
+        <p:spPr>
+          <a:xfrm>
+            <a:off x="6687238" y="553640"/>
+            <a:ext cx="3718647" cy="369332"/>
+          </a:xfrm>
+          <a:prstGeom prst="rect">
+            <a:avLst/>
+          </a:prstGeom>
+          <a:noFill/>
+        </p:spPr>
+        <p:txBody>
+          <a:bodyPr wrap="none" rtlCol="0">
+            <a:spAutoFit/>
+          </a:bodyPr>
+          <a:lstStyle/>
+          <a:p>
+            <a:r>
+              <a:rPr kumimoji="1" lang="en-US" altLang="zh-TW" dirty="0"/>
+              <a:t>https://</a:t>
+            </a:r>
+            <a:r>
+              <a:rPr kumimoji="1" lang="en-US" altLang="zh-TW" dirty="0" err="1"/>
+              <a:t>www.menti.com</a:t>
+            </a:r>
+            <a:r>
+              <a:rPr kumimoji="1" lang="en-US" altLang="zh-TW" dirty="0"/>
+              <a:t>/al9vf9d8pxft</a:t>
+            </a:r>
+            <a:endParaRPr kumimoji="1" lang="zh-TW" altLang="en-US" dirty="0"/>
+          </a:p>
+        </p:txBody>
+      </p:sp>
+      <p:pic>
+        <p:nvPicPr>
+          <p:cNvPr id="3" name="圖片 2">
+            <a:extLst>
+              <a:ext uri="{FF2B5EF4-FFF2-40B4-BE49-F238E27FC236}">
+                <a16:creationId xmlns:a16="http://schemas.microsoft.com/office/drawing/2014/main" id="{ADBCB4EA-D987-A01E-19A9-E78C7F7EE0B1}"/>
+              </a:ext>
+            </a:extLst>
+          </p:cNvPr>
+          <p:cNvPicPr>
+            <a:picLocks noChangeAspect="1"/>
+          </p:cNvPicPr>
+          <p:nvPr/>
+        </p:nvPicPr>
+        <p:blipFill>
+          <a:blip r:embed="rId2"/>
+          <a:stretch>
+            <a:fillRect/>
+          </a:stretch>
+        </p:blipFill>
+        <p:spPr>
+          <a:xfrm>
+            <a:off x="10664328" y="252196"/>
+            <a:ext cx="1281610" cy="1281610"/>
+          </a:xfrm>
+          <a:prstGeom prst="rect">
+            <a:avLst/>
+          </a:prstGeom>
+        </p:spPr>
+      </p:pic>
     </p:spTree>
     <p:extLst>
       <p:ext uri="{BB962C8B-B14F-4D97-AF65-F5344CB8AC3E}">

--- a/powerpoints/AI基礎素養.pptx
+++ b/powerpoints/AI基礎素養.pptx
@@ -203,7 +203,7 @@
           <a:p>
             <a:fld id="{218B8EE1-5A5B-C74A-BA10-FF4A9DF62F8A}" type="datetimeFigureOut">
               <a:rPr kumimoji="1" lang="zh-TW" altLang="en-US" smtClean="0"/>
-              <a:t>2026/6/28</a:t>
+              <a:t>2026/7/21</a:t>
             </a:fld>
             <a:endParaRPr kumimoji="1" lang="zh-TW" altLang="en-US"/>
           </a:p>
@@ -701,7 +701,7 @@
           <a:p>
             <a:fld id="{B211D176-C48C-784F-B433-484D39C746EB}" type="datetimeFigureOut">
               <a:rPr kumimoji="1" lang="zh-TW" altLang="en-US" smtClean="0"/>
-              <a:t>2026/6/28</a:t>
+              <a:t>2026/7/21</a:t>
             </a:fld>
             <a:endParaRPr kumimoji="1" lang="zh-TW" altLang="en-US"/>
           </a:p>
@@ -1114,7 +1114,7 @@
           <a:p>
             <a:fld id="{B211D176-C48C-784F-B433-484D39C746EB}" type="datetimeFigureOut">
               <a:rPr kumimoji="1" lang="zh-TW" altLang="en-US" smtClean="0"/>
-              <a:t>2026/6/28</a:t>
+              <a:t>2026/7/21</a:t>
             </a:fld>
             <a:endParaRPr kumimoji="1" lang="zh-TW" altLang="en-US"/>
           </a:p>
@@ -1485,7 +1485,7 @@
           <a:p>
             <a:fld id="{B211D176-C48C-784F-B433-484D39C746EB}" type="datetimeFigureOut">
               <a:rPr kumimoji="1" lang="zh-TW" altLang="en-US" smtClean="0"/>
-              <a:t>2026/6/28</a:t>
+              <a:t>2026/7/21</a:t>
             </a:fld>
             <a:endParaRPr kumimoji="1" lang="zh-TW" altLang="en-US"/>
           </a:p>
@@ -1626,7 +1626,7 @@
           <a:p>
             <a:fld id="{B211D176-C48C-784F-B433-484D39C746EB}" type="datetimeFigureOut">
               <a:rPr kumimoji="1" lang="zh-TW" altLang="en-US" smtClean="0"/>
-              <a:t>2026/6/28</a:t>
+              <a:t>2026/7/21</a:t>
             </a:fld>
             <a:endParaRPr kumimoji="1" lang="zh-TW" altLang="en-US"/>
           </a:p>
@@ -1739,7 +1739,7 @@
           <a:p>
             <a:fld id="{B211D176-C48C-784F-B433-484D39C746EB}" type="datetimeFigureOut">
               <a:rPr kumimoji="1" lang="zh-TW" altLang="en-US" smtClean="0"/>
-              <a:t>2026/6/28</a:t>
+              <a:t>2026/7/21</a:t>
             </a:fld>
             <a:endParaRPr kumimoji="1" lang="zh-TW" altLang="en-US"/>
           </a:p>
@@ -2050,7 +2050,7 @@
           <a:p>
             <a:fld id="{B211D176-C48C-784F-B433-484D39C746EB}" type="datetimeFigureOut">
               <a:rPr kumimoji="1" lang="zh-TW" altLang="en-US" smtClean="0"/>
-              <a:t>2026/6/28</a:t>
+              <a:t>2026/7/21</a:t>
             </a:fld>
             <a:endParaRPr kumimoji="1" lang="zh-TW" altLang="en-US"/>
           </a:p>
@@ -2341,7 +2341,7 @@
           <a:p>
             <a:fld id="{B211D176-C48C-784F-B433-484D39C746EB}" type="datetimeFigureOut">
               <a:rPr kumimoji="1" lang="zh-TW" altLang="en-US" smtClean="0"/>
-              <a:t>2026/6/28</a:t>
+              <a:t>2026/7/21</a:t>
             </a:fld>
             <a:endParaRPr kumimoji="1" lang="zh-TW" altLang="en-US"/>
           </a:p>
@@ -2539,7 +2539,7 @@
           <a:p>
             <a:fld id="{B211D176-C48C-784F-B433-484D39C746EB}" type="datetimeFigureOut">
               <a:rPr kumimoji="1" lang="zh-TW" altLang="en-US" smtClean="0"/>
-              <a:t>2026/6/28</a:t>
+              <a:t>2026/7/21</a:t>
             </a:fld>
             <a:endParaRPr kumimoji="1" lang="zh-TW" altLang="en-US"/>
           </a:p>
@@ -2747,7 +2747,7 @@
           <a:p>
             <a:fld id="{B211D176-C48C-784F-B433-484D39C746EB}" type="datetimeFigureOut">
               <a:rPr kumimoji="1" lang="zh-TW" altLang="en-US" smtClean="0"/>
-              <a:t>2026/6/28</a:t>
+              <a:t>2026/7/21</a:t>
             </a:fld>
             <a:endParaRPr kumimoji="1" lang="zh-TW" altLang="en-US"/>
           </a:p>
@@ -2945,7 +2945,7 @@
           <a:p>
             <a:fld id="{B211D176-C48C-784F-B433-484D39C746EB}" type="datetimeFigureOut">
               <a:rPr kumimoji="1" lang="zh-TW" altLang="en-US" smtClean="0"/>
-              <a:t>2026/6/28</a:t>
+              <a:t>2026/7/21</a:t>
             </a:fld>
             <a:endParaRPr kumimoji="1" lang="zh-TW" altLang="en-US"/>
           </a:p>
@@ -3120,7 +3120,7 @@
           <a:p>
             <a:fld id="{B211D176-C48C-784F-B433-484D39C746EB}" type="datetimeFigureOut">
               <a:rPr kumimoji="1" lang="zh-TW" altLang="en-US" smtClean="0"/>
-              <a:t>2026/6/28</a:t>
+              <a:t>2026/7/21</a:t>
             </a:fld>
             <a:endParaRPr kumimoji="1" lang="zh-TW" altLang="en-US"/>
           </a:p>
@@ -3354,7 +3354,7 @@
           <a:p>
             <a:fld id="{B211D176-C48C-784F-B433-484D39C746EB}" type="datetimeFigureOut">
               <a:rPr kumimoji="1" lang="zh-TW" altLang="en-US" smtClean="0"/>
-              <a:t>2026/6/28</a:t>
+              <a:t>2026/7/21</a:t>
             </a:fld>
             <a:endParaRPr kumimoji="1" lang="zh-TW" altLang="en-US"/>
           </a:p>
@@ -3629,7 +3629,7 @@
           <a:p>
             <a:fld id="{B211D176-C48C-784F-B433-484D39C746EB}" type="datetimeFigureOut">
               <a:rPr kumimoji="1" lang="zh-TW" altLang="en-US" smtClean="0"/>
-              <a:t>2026/6/28</a:t>
+              <a:t>2026/7/21</a:t>
             </a:fld>
             <a:endParaRPr kumimoji="1" lang="zh-TW" altLang="en-US"/>
           </a:p>
@@ -3894,7 +3894,7 @@
           <a:p>
             <a:fld id="{B211D176-C48C-784F-B433-484D39C746EB}" type="datetimeFigureOut">
               <a:rPr kumimoji="1" lang="zh-TW" altLang="en-US" smtClean="0"/>
-              <a:t>2026/6/28</a:t>
+              <a:t>2026/7/21</a:t>
             </a:fld>
             <a:endParaRPr kumimoji="1" lang="zh-TW" altLang="en-US"/>
           </a:p>
@@ -4260,7 +4260,7 @@
           <a:p>
             <a:fld id="{B211D176-C48C-784F-B433-484D39C746EB}" type="datetimeFigureOut">
               <a:rPr kumimoji="1" lang="zh-TW" altLang="en-US" smtClean="0"/>
-              <a:t>2026/6/28</a:t>
+              <a:t>2026/7/21</a:t>
             </a:fld>
             <a:endParaRPr kumimoji="1" lang="zh-TW" altLang="en-US"/>
           </a:p>
@@ -4497,7 +4497,7 @@
           <a:p>
             <a:fld id="{B211D176-C48C-784F-B433-484D39C746EB}" type="datetimeFigureOut">
               <a:rPr kumimoji="1" lang="zh-TW" altLang="en-US" smtClean="0"/>
-              <a:t>2026/6/28</a:t>
+              <a:t>2026/7/21</a:t>
             </a:fld>
             <a:endParaRPr kumimoji="1" lang="zh-TW" altLang="en-US"/>
           </a:p>
@@ -4835,7 +4835,7 @@
           <a:p>
             <a:fld id="{B211D176-C48C-784F-B433-484D39C746EB}" type="datetimeFigureOut">
               <a:rPr kumimoji="1" lang="zh-TW" altLang="en-US" smtClean="0"/>
-              <a:t>2026/6/28</a:t>
+              <a:t>2026/7/21</a:t>
             </a:fld>
             <a:endParaRPr kumimoji="1" lang="zh-TW" altLang="en-US"/>
           </a:p>
@@ -5092,7 +5092,7 @@
             <a:fld id="{B211D176-C48C-784F-B433-484D39C746EB}" type="datetimeFigureOut">
               <a:rPr kumimoji="1" lang="zh-TW" altLang="en-US" smtClean="0"/>
               <a:pPr/>
-              <a:t>2026/6/28</a:t>
+              <a:t>2026/7/21</a:t>
             </a:fld>
             <a:endParaRPr kumimoji="1" lang="zh-TW" altLang="en-US"/>
           </a:p>
@@ -5667,11 +5667,11 @@
               <a:t>小時（</a:t>
             </a:r>
             <a:r>
-              <a:rPr kumimoji="1" lang="en-US" altLang="zh-TW" b="1" dirty="0"/>
-              <a:t>7/2~8/6</a:t>
-            </a:r>
-            <a:r>
-              <a:rPr kumimoji="1" lang="zh-TW" altLang="en-US" b="1" dirty="0"/>
+              <a:rPr kumimoji="1" lang="en-US" altLang="zh-TW" b="1"/>
+              <a:t>7/21~8/25</a:t>
+            </a:r>
+            <a:r>
+              <a:rPr kumimoji="1" lang="zh-TW" altLang="en-US" b="1"/>
               <a:t>）</a:t>
             </a:r>
             <a:endParaRPr kumimoji="1" lang="en-US" altLang="zh-TW" b="1" dirty="0"/>
@@ -7656,7 +7656,7 @@
         </p:nvSpPr>
         <p:spPr>
           <a:xfrm>
-            <a:off x="6687238" y="553640"/>
+            <a:off x="6764356" y="553640"/>
             <a:ext cx="3718647" cy="369332"/>
           </a:xfrm>
           <a:prstGeom prst="rect">
@@ -7671,15 +7671,21 @@
           <a:lstStyle/>
           <a:p>
             <a:r>
-              <a:rPr kumimoji="1" lang="en-US" altLang="zh-TW" dirty="0"/>
+              <a:rPr kumimoji="1" lang="en-US" altLang="zh-TW" dirty="0">
+                <a:hlinkClick r:id="rId2"/>
+              </a:rPr>
               <a:t>https://</a:t>
             </a:r>
             <a:r>
-              <a:rPr kumimoji="1" lang="en-US" altLang="zh-TW" dirty="0" err="1"/>
+              <a:rPr kumimoji="1" lang="en-US" altLang="zh-TW" dirty="0" err="1">
+                <a:hlinkClick r:id="rId2"/>
+              </a:rPr>
               <a:t>www.menti.com</a:t>
             </a:r>
             <a:r>
-              <a:rPr kumimoji="1" lang="en-US" altLang="zh-TW" dirty="0"/>
+              <a:rPr kumimoji="1" lang="en-US" altLang="zh-TW" dirty="0">
+                <a:hlinkClick r:id="rId2"/>
+              </a:rPr>
               <a:t>/al9vf9d8pxft</a:t>
             </a:r>
             <a:endParaRPr kumimoji="1" lang="zh-TW" altLang="en-US" dirty="0"/>
@@ -7701,7 +7707,7 @@
           <p:nvPr/>
         </p:nvPicPr>
         <p:blipFill>
-          <a:blip r:embed="rId2"/>
+          <a:blip r:embed="rId3"/>
           <a:stretch>
             <a:fillRect/>
           </a:stretch>
